--- a/Mon espasse sante AMELI/Tuto_Compte_Ameli.pptx
+++ b/Mon espasse sante AMELI/Tuto_Compte_Ameli.pptx
@@ -3783,6 +3783,46 @@
           </a:p>
         </p:txBody>
       </p:sp>
+      <p:sp>
+        <p:nvSpPr>
+          <p:cNvPr id="54" name="ZoneTexte 53">
+            <a:extLst>
+              <a:ext uri="{FF2B5EF4-FFF2-40B4-BE49-F238E27FC236}">
+                <a16:creationId xmlns:a16="http://schemas.microsoft.com/office/drawing/2014/main" id="{FE49427D-2C09-E5F8-7112-689DBED4864B}"/>
+              </a:ext>
+            </a:extLst>
+          </p:cNvPr>
+          <p:cNvSpPr txBox="1"/>
+          <p:nvPr/>
+        </p:nvSpPr>
+        <p:spPr>
+          <a:xfrm>
+            <a:off x="0" y="6578600"/>
+            <a:ext cx="12192000" cy="230832"/>
+          </a:xfrm>
+          <a:prstGeom prst="rect">
+            <a:avLst/>
+          </a:prstGeom>
+          <a:noFill/>
+        </p:spPr>
+        <p:txBody>
+          <a:bodyPr vert="horz" rtlCol="0">
+            <a:spAutoFit/>
+          </a:bodyPr>
+          <a:lstStyle/>
+          <a:p>
+            <a:pPr algn="ctr"/>
+            <a:r>
+              <a:rPr lang="fr-FR" sz="900">
+                <a:solidFill>
+                  <a:srgbClr val="B4B4B4"/>
+                </a:solidFill>
+              </a:rPr>
+              <a:t>(c) titi_23 - mediateur-numerique.github.io - Reproduction interdite sans autorisation</a:t>
+            </a:r>
+          </a:p>
+        </p:txBody>
+      </p:sp>
     </p:spTree>
   </p:cSld>
   <p:clrMapOvr>
@@ -4516,6 +4556,46 @@
           </a:p>
         </p:txBody>
       </p:sp>
+      <p:sp>
+        <p:nvSpPr>
+          <p:cNvPr id="21" name="ZoneTexte 20">
+            <a:extLst>
+              <a:ext uri="{FF2B5EF4-FFF2-40B4-BE49-F238E27FC236}">
+                <a16:creationId xmlns:a16="http://schemas.microsoft.com/office/drawing/2014/main" id="{52D71BE2-CF8F-51E2-E40A-DF0310FA7F8C}"/>
+              </a:ext>
+            </a:extLst>
+          </p:cNvPr>
+          <p:cNvSpPr txBox="1"/>
+          <p:nvPr/>
+        </p:nvSpPr>
+        <p:spPr>
+          <a:xfrm>
+            <a:off x="0" y="6578600"/>
+            <a:ext cx="12192000" cy="230832"/>
+          </a:xfrm>
+          <a:prstGeom prst="rect">
+            <a:avLst/>
+          </a:prstGeom>
+          <a:noFill/>
+        </p:spPr>
+        <p:txBody>
+          <a:bodyPr vert="horz" rtlCol="0">
+            <a:spAutoFit/>
+          </a:bodyPr>
+          <a:lstStyle/>
+          <a:p>
+            <a:pPr algn="ctr"/>
+            <a:r>
+              <a:rPr lang="fr-FR" sz="900">
+                <a:solidFill>
+                  <a:srgbClr val="B4B4B4"/>
+                </a:solidFill>
+              </a:rPr>
+              <a:t>(c) titi_23 - mediateur-numerique.github.io - Reproduction interdite sans autorisation</a:t>
+            </a:r>
+          </a:p>
+        </p:txBody>
+      </p:sp>
     </p:spTree>
   </p:cSld>
   <p:clrMapOvr>
@@ -5457,6 +5537,46 @@
           </a:p>
         </p:txBody>
       </p:sp>
+      <p:sp>
+        <p:nvSpPr>
+          <p:cNvPr id="26" name="ZoneTexte 25">
+            <a:extLst>
+              <a:ext uri="{FF2B5EF4-FFF2-40B4-BE49-F238E27FC236}">
+                <a16:creationId xmlns:a16="http://schemas.microsoft.com/office/drawing/2014/main" id="{3F0A5B42-1056-C0B4-3650-A09C2C435ABF}"/>
+              </a:ext>
+            </a:extLst>
+          </p:cNvPr>
+          <p:cNvSpPr txBox="1"/>
+          <p:nvPr/>
+        </p:nvSpPr>
+        <p:spPr>
+          <a:xfrm>
+            <a:off x="0" y="6578600"/>
+            <a:ext cx="12192000" cy="230832"/>
+          </a:xfrm>
+          <a:prstGeom prst="rect">
+            <a:avLst/>
+          </a:prstGeom>
+          <a:noFill/>
+        </p:spPr>
+        <p:txBody>
+          <a:bodyPr vert="horz" rtlCol="0">
+            <a:spAutoFit/>
+          </a:bodyPr>
+          <a:lstStyle/>
+          <a:p>
+            <a:pPr algn="ctr"/>
+            <a:r>
+              <a:rPr lang="fr-FR" sz="900">
+                <a:solidFill>
+                  <a:srgbClr val="B4B4B4"/>
+                </a:solidFill>
+              </a:rPr>
+              <a:t>(c) titi_23 - mediateur-numerique.github.io - Reproduction interdite sans autorisation</a:t>
+            </a:r>
+          </a:p>
+        </p:txBody>
+      </p:sp>
     </p:spTree>
   </p:cSld>
   <p:clrMapOvr>
@@ -6499,6 +6619,46 @@
           </a:p>
         </p:txBody>
       </p:sp>
+      <p:sp>
+        <p:nvSpPr>
+          <p:cNvPr id="30" name="ZoneTexte 29">
+            <a:extLst>
+              <a:ext uri="{FF2B5EF4-FFF2-40B4-BE49-F238E27FC236}">
+                <a16:creationId xmlns:a16="http://schemas.microsoft.com/office/drawing/2014/main" id="{F5A5ED43-13A5-8E96-684C-1A6FF9CA482B}"/>
+              </a:ext>
+            </a:extLst>
+          </p:cNvPr>
+          <p:cNvSpPr txBox="1"/>
+          <p:nvPr/>
+        </p:nvSpPr>
+        <p:spPr>
+          <a:xfrm>
+            <a:off x="0" y="6578600"/>
+            <a:ext cx="12192000" cy="230832"/>
+          </a:xfrm>
+          <a:prstGeom prst="rect">
+            <a:avLst/>
+          </a:prstGeom>
+          <a:noFill/>
+        </p:spPr>
+        <p:txBody>
+          <a:bodyPr vert="horz" rtlCol="0">
+            <a:spAutoFit/>
+          </a:bodyPr>
+          <a:lstStyle/>
+          <a:p>
+            <a:pPr algn="ctr"/>
+            <a:r>
+              <a:rPr lang="fr-FR" sz="900">
+                <a:solidFill>
+                  <a:srgbClr val="B4B4B4"/>
+                </a:solidFill>
+              </a:rPr>
+              <a:t>(c) titi_23 - mediateur-numerique.github.io - Reproduction interdite sans autorisation</a:t>
+            </a:r>
+          </a:p>
+        </p:txBody>
+      </p:sp>
     </p:spTree>
   </p:cSld>
   <p:clrMapOvr>
@@ -7526,6 +7686,46 @@
           </a:p>
         </p:txBody>
       </p:sp>
+      <p:sp>
+        <p:nvSpPr>
+          <p:cNvPr id="30" name="ZoneTexte 29">
+            <a:extLst>
+              <a:ext uri="{FF2B5EF4-FFF2-40B4-BE49-F238E27FC236}">
+                <a16:creationId xmlns:a16="http://schemas.microsoft.com/office/drawing/2014/main" id="{D8F9C3AC-14E3-96E5-F2CC-A046A88220DF}"/>
+              </a:ext>
+            </a:extLst>
+          </p:cNvPr>
+          <p:cNvSpPr txBox="1"/>
+          <p:nvPr/>
+        </p:nvSpPr>
+        <p:spPr>
+          <a:xfrm>
+            <a:off x="0" y="6578600"/>
+            <a:ext cx="12192000" cy="230832"/>
+          </a:xfrm>
+          <a:prstGeom prst="rect">
+            <a:avLst/>
+          </a:prstGeom>
+          <a:noFill/>
+        </p:spPr>
+        <p:txBody>
+          <a:bodyPr vert="horz" rtlCol="0">
+            <a:spAutoFit/>
+          </a:bodyPr>
+          <a:lstStyle/>
+          <a:p>
+            <a:pPr algn="ctr"/>
+            <a:r>
+              <a:rPr lang="fr-FR" sz="900">
+                <a:solidFill>
+                  <a:srgbClr val="B4B4B4"/>
+                </a:solidFill>
+              </a:rPr>
+              <a:t>(c) titi_23 - mediateur-numerique.github.io - Reproduction interdite sans autorisation</a:t>
+            </a:r>
+          </a:p>
+        </p:txBody>
+      </p:sp>
     </p:spTree>
   </p:cSld>
   <p:clrMapOvr>
@@ -8506,6 +8706,46 @@
           </a:p>
         </p:txBody>
       </p:sp>
+      <p:sp>
+        <p:nvSpPr>
+          <p:cNvPr id="27" name="ZoneTexte 26">
+            <a:extLst>
+              <a:ext uri="{FF2B5EF4-FFF2-40B4-BE49-F238E27FC236}">
+                <a16:creationId xmlns:a16="http://schemas.microsoft.com/office/drawing/2014/main" id="{A706D510-4543-ABED-D692-5D8D4C03EC94}"/>
+              </a:ext>
+            </a:extLst>
+          </p:cNvPr>
+          <p:cNvSpPr txBox="1"/>
+          <p:nvPr/>
+        </p:nvSpPr>
+        <p:spPr>
+          <a:xfrm>
+            <a:off x="0" y="6578600"/>
+            <a:ext cx="12192000" cy="230832"/>
+          </a:xfrm>
+          <a:prstGeom prst="rect">
+            <a:avLst/>
+          </a:prstGeom>
+          <a:noFill/>
+        </p:spPr>
+        <p:txBody>
+          <a:bodyPr vert="horz" rtlCol="0">
+            <a:spAutoFit/>
+          </a:bodyPr>
+          <a:lstStyle/>
+          <a:p>
+            <a:pPr algn="ctr"/>
+            <a:r>
+              <a:rPr lang="fr-FR" sz="900">
+                <a:solidFill>
+                  <a:srgbClr val="B4B4B4"/>
+                </a:solidFill>
+              </a:rPr>
+              <a:t>(c) titi_23 - mediateur-numerique.github.io - Reproduction interdite sans autorisation</a:t>
+            </a:r>
+          </a:p>
+        </p:txBody>
+      </p:sp>
     </p:spTree>
   </p:cSld>
   <p:clrMapOvr>
@@ -9757,6 +9997,46 @@
           </a:p>
         </p:txBody>
       </p:sp>
+      <p:sp>
+        <p:nvSpPr>
+          <p:cNvPr id="36" name="ZoneTexte 35">
+            <a:extLst>
+              <a:ext uri="{FF2B5EF4-FFF2-40B4-BE49-F238E27FC236}">
+                <a16:creationId xmlns:a16="http://schemas.microsoft.com/office/drawing/2014/main" id="{718F99F4-37C3-D04F-9F83-254E5A52EC70}"/>
+              </a:ext>
+            </a:extLst>
+          </p:cNvPr>
+          <p:cNvSpPr txBox="1"/>
+          <p:nvPr/>
+        </p:nvSpPr>
+        <p:spPr>
+          <a:xfrm>
+            <a:off x="0" y="6578600"/>
+            <a:ext cx="12192000" cy="230832"/>
+          </a:xfrm>
+          <a:prstGeom prst="rect">
+            <a:avLst/>
+          </a:prstGeom>
+          <a:noFill/>
+        </p:spPr>
+        <p:txBody>
+          <a:bodyPr vert="horz" rtlCol="0">
+            <a:spAutoFit/>
+          </a:bodyPr>
+          <a:lstStyle/>
+          <a:p>
+            <a:pPr algn="ctr"/>
+            <a:r>
+              <a:rPr lang="fr-FR" sz="900">
+                <a:solidFill>
+                  <a:srgbClr val="B4B4B4"/>
+                </a:solidFill>
+              </a:rPr>
+              <a:t>(c) titi_23 - mediateur-numerique.github.io - Reproduction interdite sans autorisation</a:t>
+            </a:r>
+          </a:p>
+        </p:txBody>
+      </p:sp>
     </p:spTree>
   </p:cSld>
   <p:clrMapOvr>
@@ -10444,6 +10724,46 @@
           </a:p>
         </p:txBody>
       </p:sp>
+      <p:sp>
+        <p:nvSpPr>
+          <p:cNvPr id="16" name="ZoneTexte 15">
+            <a:extLst>
+              <a:ext uri="{FF2B5EF4-FFF2-40B4-BE49-F238E27FC236}">
+                <a16:creationId xmlns:a16="http://schemas.microsoft.com/office/drawing/2014/main" id="{9B46A9F6-9CA4-4107-F0AD-40B4F536157C}"/>
+              </a:ext>
+            </a:extLst>
+          </p:cNvPr>
+          <p:cNvSpPr txBox="1"/>
+          <p:nvPr/>
+        </p:nvSpPr>
+        <p:spPr>
+          <a:xfrm>
+            <a:off x="0" y="6578600"/>
+            <a:ext cx="12192000" cy="230832"/>
+          </a:xfrm>
+          <a:prstGeom prst="rect">
+            <a:avLst/>
+          </a:prstGeom>
+          <a:noFill/>
+        </p:spPr>
+        <p:txBody>
+          <a:bodyPr vert="horz" rtlCol="0">
+            <a:spAutoFit/>
+          </a:bodyPr>
+          <a:lstStyle/>
+          <a:p>
+            <a:pPr algn="ctr"/>
+            <a:r>
+              <a:rPr lang="fr-FR" sz="900">
+                <a:solidFill>
+                  <a:srgbClr val="B4B4B4"/>
+                </a:solidFill>
+              </a:rPr>
+              <a:t>(c) titi_23 - mediateur-numerique.github.io - Reproduction interdite sans autorisation</a:t>
+            </a:r>
+          </a:p>
+        </p:txBody>
+      </p:sp>
     </p:spTree>
   </p:cSld>
   <p:clrMapOvr>
@@ -11149,6 +11469,46 @@
           </a:p>
         </p:txBody>
       </p:sp>
+      <p:sp>
+        <p:nvSpPr>
+          <p:cNvPr id="22" name="ZoneTexte 21">
+            <a:extLst>
+              <a:ext uri="{FF2B5EF4-FFF2-40B4-BE49-F238E27FC236}">
+                <a16:creationId xmlns:a16="http://schemas.microsoft.com/office/drawing/2014/main" id="{B9115A6D-82D5-0D64-5E5C-E2E632F765DB}"/>
+              </a:ext>
+            </a:extLst>
+          </p:cNvPr>
+          <p:cNvSpPr txBox="1"/>
+          <p:nvPr/>
+        </p:nvSpPr>
+        <p:spPr>
+          <a:xfrm>
+            <a:off x="0" y="6578600"/>
+            <a:ext cx="12192000" cy="230832"/>
+          </a:xfrm>
+          <a:prstGeom prst="rect">
+            <a:avLst/>
+          </a:prstGeom>
+          <a:noFill/>
+        </p:spPr>
+        <p:txBody>
+          <a:bodyPr vert="horz" rtlCol="0">
+            <a:spAutoFit/>
+          </a:bodyPr>
+          <a:lstStyle/>
+          <a:p>
+            <a:pPr algn="ctr"/>
+            <a:r>
+              <a:rPr lang="fr-FR" sz="900">
+                <a:solidFill>
+                  <a:srgbClr val="B4B4B4"/>
+                </a:solidFill>
+              </a:rPr>
+              <a:t>(c) titi_23 - mediateur-numerique.github.io - Reproduction interdite sans autorisation</a:t>
+            </a:r>
+          </a:p>
+        </p:txBody>
+      </p:sp>
     </p:spTree>
   </p:cSld>
   <p:clrMapOvr>
@@ -11450,6 +11810,46 @@
           </a:p>
         </p:txBody>
       </p:sp>
+      <p:sp>
+        <p:nvSpPr>
+          <p:cNvPr id="10" name="ZoneTexte 9">
+            <a:extLst>
+              <a:ext uri="{FF2B5EF4-FFF2-40B4-BE49-F238E27FC236}">
+                <a16:creationId xmlns:a16="http://schemas.microsoft.com/office/drawing/2014/main" id="{A8B68DEC-117E-9F1B-C897-F7AAE34EBC81}"/>
+              </a:ext>
+            </a:extLst>
+          </p:cNvPr>
+          <p:cNvSpPr txBox="1"/>
+          <p:nvPr/>
+        </p:nvSpPr>
+        <p:spPr>
+          <a:xfrm>
+            <a:off x="0" y="6578600"/>
+            <a:ext cx="12192000" cy="230832"/>
+          </a:xfrm>
+          <a:prstGeom prst="rect">
+            <a:avLst/>
+          </a:prstGeom>
+          <a:noFill/>
+        </p:spPr>
+        <p:txBody>
+          <a:bodyPr vert="horz" rtlCol="0">
+            <a:spAutoFit/>
+          </a:bodyPr>
+          <a:lstStyle/>
+          <a:p>
+            <a:pPr algn="ctr"/>
+            <a:r>
+              <a:rPr lang="fr-FR" sz="900">
+                <a:solidFill>
+                  <a:srgbClr val="B4B4B4"/>
+                </a:solidFill>
+              </a:rPr>
+              <a:t>(c) titi_23 - mediateur-numerique.github.io - Reproduction interdite sans autorisation</a:t>
+            </a:r>
+          </a:p>
+        </p:txBody>
+      </p:sp>
     </p:spTree>
   </p:cSld>
   <p:clrMapOvr>
@@ -12515,6 +12915,46 @@
           </a:p>
         </p:txBody>
       </p:sp>
+      <p:sp>
+        <p:nvSpPr>
+          <p:cNvPr id="30" name="ZoneTexte 29">
+            <a:extLst>
+              <a:ext uri="{FF2B5EF4-FFF2-40B4-BE49-F238E27FC236}">
+                <a16:creationId xmlns:a16="http://schemas.microsoft.com/office/drawing/2014/main" id="{41B16876-267F-11E7-64ED-0CDE745399CD}"/>
+              </a:ext>
+            </a:extLst>
+          </p:cNvPr>
+          <p:cNvSpPr txBox="1"/>
+          <p:nvPr/>
+        </p:nvSpPr>
+        <p:spPr>
+          <a:xfrm>
+            <a:off x="0" y="6578600"/>
+            <a:ext cx="12192000" cy="230832"/>
+          </a:xfrm>
+          <a:prstGeom prst="rect">
+            <a:avLst/>
+          </a:prstGeom>
+          <a:noFill/>
+        </p:spPr>
+        <p:txBody>
+          <a:bodyPr vert="horz" rtlCol="0">
+            <a:spAutoFit/>
+          </a:bodyPr>
+          <a:lstStyle/>
+          <a:p>
+            <a:pPr algn="ctr"/>
+            <a:r>
+              <a:rPr lang="fr-FR" sz="900">
+                <a:solidFill>
+                  <a:srgbClr val="B4B4B4"/>
+                </a:solidFill>
+              </a:rPr>
+              <a:t>(c) titi_23 - mediateur-numerique.github.io - Reproduction interdite sans autorisation</a:t>
+            </a:r>
+          </a:p>
+        </p:txBody>
+      </p:sp>
     </p:spTree>
   </p:cSld>
   <p:clrMapOvr>
@@ -13451,6 +13891,46 @@
           </a:p>
         </p:txBody>
       </p:sp>
+      <p:sp>
+        <p:nvSpPr>
+          <p:cNvPr id="27" name="ZoneTexte 26">
+            <a:extLst>
+              <a:ext uri="{FF2B5EF4-FFF2-40B4-BE49-F238E27FC236}">
+                <a16:creationId xmlns:a16="http://schemas.microsoft.com/office/drawing/2014/main" id="{A07E820D-DACA-891D-724F-CD15F5192FC4}"/>
+              </a:ext>
+            </a:extLst>
+          </p:cNvPr>
+          <p:cNvSpPr txBox="1"/>
+          <p:nvPr/>
+        </p:nvSpPr>
+        <p:spPr>
+          <a:xfrm>
+            <a:off x="0" y="6578600"/>
+            <a:ext cx="12192000" cy="230832"/>
+          </a:xfrm>
+          <a:prstGeom prst="rect">
+            <a:avLst/>
+          </a:prstGeom>
+          <a:noFill/>
+        </p:spPr>
+        <p:txBody>
+          <a:bodyPr vert="horz" rtlCol="0">
+            <a:spAutoFit/>
+          </a:bodyPr>
+          <a:lstStyle/>
+          <a:p>
+            <a:pPr algn="ctr"/>
+            <a:r>
+              <a:rPr lang="fr-FR" sz="900">
+                <a:solidFill>
+                  <a:srgbClr val="B4B4B4"/>
+                </a:solidFill>
+              </a:rPr>
+              <a:t>(c) titi_23 - mediateur-numerique.github.io - Reproduction interdite sans autorisation</a:t>
+            </a:r>
+          </a:p>
+        </p:txBody>
+      </p:sp>
     </p:spTree>
   </p:cSld>
   <p:clrMapOvr>
@@ -14231,6 +14711,46 @@
           </a:p>
         </p:txBody>
       </p:sp>
+      <p:sp>
+        <p:nvSpPr>
+          <p:cNvPr id="19" name="ZoneTexte 18">
+            <a:extLst>
+              <a:ext uri="{FF2B5EF4-FFF2-40B4-BE49-F238E27FC236}">
+                <a16:creationId xmlns:a16="http://schemas.microsoft.com/office/drawing/2014/main" id="{BAC992D4-F692-5763-1057-103FCCB49944}"/>
+              </a:ext>
+            </a:extLst>
+          </p:cNvPr>
+          <p:cNvSpPr txBox="1"/>
+          <p:nvPr/>
+        </p:nvSpPr>
+        <p:spPr>
+          <a:xfrm>
+            <a:off x="0" y="6578600"/>
+            <a:ext cx="12192000" cy="230832"/>
+          </a:xfrm>
+          <a:prstGeom prst="rect">
+            <a:avLst/>
+          </a:prstGeom>
+          <a:noFill/>
+        </p:spPr>
+        <p:txBody>
+          <a:bodyPr vert="horz" rtlCol="0">
+            <a:spAutoFit/>
+          </a:bodyPr>
+          <a:lstStyle/>
+          <a:p>
+            <a:pPr algn="ctr"/>
+            <a:r>
+              <a:rPr lang="fr-FR" sz="900">
+                <a:solidFill>
+                  <a:srgbClr val="B4B4B4"/>
+                </a:solidFill>
+              </a:rPr>
+              <a:t>(c) titi_23 - mediateur-numerique.github.io - Reproduction interdite sans autorisation</a:t>
+            </a:r>
+          </a:p>
+        </p:txBody>
+      </p:sp>
     </p:spTree>
   </p:cSld>
   <p:clrMapOvr>
@@ -15128,6 +15648,46 @@
           </a:p>
         </p:txBody>
       </p:sp>
+      <p:sp>
+        <p:nvSpPr>
+          <p:cNvPr id="26" name="ZoneTexte 25">
+            <a:extLst>
+              <a:ext uri="{FF2B5EF4-FFF2-40B4-BE49-F238E27FC236}">
+                <a16:creationId xmlns:a16="http://schemas.microsoft.com/office/drawing/2014/main" id="{DD10EDED-02AE-CBDF-AAB9-52C4D7DED1B7}"/>
+              </a:ext>
+            </a:extLst>
+          </p:cNvPr>
+          <p:cNvSpPr txBox="1"/>
+          <p:nvPr/>
+        </p:nvSpPr>
+        <p:spPr>
+          <a:xfrm>
+            <a:off x="0" y="6578600"/>
+            <a:ext cx="12192000" cy="230832"/>
+          </a:xfrm>
+          <a:prstGeom prst="rect">
+            <a:avLst/>
+          </a:prstGeom>
+          <a:noFill/>
+        </p:spPr>
+        <p:txBody>
+          <a:bodyPr vert="horz" rtlCol="0">
+            <a:spAutoFit/>
+          </a:bodyPr>
+          <a:lstStyle/>
+          <a:p>
+            <a:pPr algn="ctr"/>
+            <a:r>
+              <a:rPr lang="fr-FR" sz="900">
+                <a:solidFill>
+                  <a:srgbClr val="B4B4B4"/>
+                </a:solidFill>
+              </a:rPr>
+              <a:t>(c) titi_23 - mediateur-numerique.github.io - Reproduction interdite sans autorisation</a:t>
+            </a:r>
+          </a:p>
+        </p:txBody>
+      </p:sp>
     </p:spTree>
   </p:cSld>
   <p:clrMapOvr>
@@ -15974,6 +16534,46 @@
           </a:p>
         </p:txBody>
       </p:sp>
+      <p:sp>
+        <p:nvSpPr>
+          <p:cNvPr id="24" name="ZoneTexte 23">
+            <a:extLst>
+              <a:ext uri="{FF2B5EF4-FFF2-40B4-BE49-F238E27FC236}">
+                <a16:creationId xmlns:a16="http://schemas.microsoft.com/office/drawing/2014/main" id="{FE14ABBD-C99F-53BD-B883-12D705262DC0}"/>
+              </a:ext>
+            </a:extLst>
+          </p:cNvPr>
+          <p:cNvSpPr txBox="1"/>
+          <p:nvPr/>
+        </p:nvSpPr>
+        <p:spPr>
+          <a:xfrm>
+            <a:off x="0" y="6578600"/>
+            <a:ext cx="12192000" cy="230832"/>
+          </a:xfrm>
+          <a:prstGeom prst="rect">
+            <a:avLst/>
+          </a:prstGeom>
+          <a:noFill/>
+        </p:spPr>
+        <p:txBody>
+          <a:bodyPr vert="horz" rtlCol="0">
+            <a:spAutoFit/>
+          </a:bodyPr>
+          <a:lstStyle/>
+          <a:p>
+            <a:pPr algn="ctr"/>
+            <a:r>
+              <a:rPr lang="fr-FR" sz="900">
+                <a:solidFill>
+                  <a:srgbClr val="B4B4B4"/>
+                </a:solidFill>
+              </a:rPr>
+              <a:t>(c) titi_23 - mediateur-numerique.github.io - Reproduction interdite sans autorisation</a:t>
+            </a:r>
+          </a:p>
+        </p:txBody>
+      </p:sp>
     </p:spTree>
   </p:cSld>
   <p:clrMapOvr>
@@ -17280,6 +17880,46 @@
           </a:p>
         </p:txBody>
       </p:sp>
+      <p:sp>
+        <p:nvSpPr>
+          <p:cNvPr id="37" name="ZoneTexte 36">
+            <a:extLst>
+              <a:ext uri="{FF2B5EF4-FFF2-40B4-BE49-F238E27FC236}">
+                <a16:creationId xmlns:a16="http://schemas.microsoft.com/office/drawing/2014/main" id="{A500EA38-9F8C-48B9-8D46-030A7420A380}"/>
+              </a:ext>
+            </a:extLst>
+          </p:cNvPr>
+          <p:cNvSpPr txBox="1"/>
+          <p:nvPr/>
+        </p:nvSpPr>
+        <p:spPr>
+          <a:xfrm>
+            <a:off x="0" y="6578600"/>
+            <a:ext cx="12192000" cy="230832"/>
+          </a:xfrm>
+          <a:prstGeom prst="rect">
+            <a:avLst/>
+          </a:prstGeom>
+          <a:noFill/>
+        </p:spPr>
+        <p:txBody>
+          <a:bodyPr vert="horz" rtlCol="0">
+            <a:spAutoFit/>
+          </a:bodyPr>
+          <a:lstStyle/>
+          <a:p>
+            <a:pPr algn="ctr"/>
+            <a:r>
+              <a:rPr lang="fr-FR" sz="900">
+                <a:solidFill>
+                  <a:srgbClr val="B4B4B4"/>
+                </a:solidFill>
+              </a:rPr>
+              <a:t>(c) titi_23 - mediateur-numerique.github.io - Reproduction interdite sans autorisation</a:t>
+            </a:r>
+          </a:p>
+        </p:txBody>
+      </p:sp>
     </p:spTree>
   </p:cSld>
   <p:clrMapOvr>
@@ -18455,6 +19095,46 @@
           </a:p>
         </p:txBody>
       </p:sp>
+      <p:sp>
+        <p:nvSpPr>
+          <p:cNvPr id="34" name="ZoneTexte 33">
+            <a:extLst>
+              <a:ext uri="{FF2B5EF4-FFF2-40B4-BE49-F238E27FC236}">
+                <a16:creationId xmlns:a16="http://schemas.microsoft.com/office/drawing/2014/main" id="{11E00ACC-8E40-49D8-AB80-CBE59E3C009B}"/>
+              </a:ext>
+            </a:extLst>
+          </p:cNvPr>
+          <p:cNvSpPr txBox="1"/>
+          <p:nvPr/>
+        </p:nvSpPr>
+        <p:spPr>
+          <a:xfrm>
+            <a:off x="0" y="6578600"/>
+            <a:ext cx="12192000" cy="230832"/>
+          </a:xfrm>
+          <a:prstGeom prst="rect">
+            <a:avLst/>
+          </a:prstGeom>
+          <a:noFill/>
+        </p:spPr>
+        <p:txBody>
+          <a:bodyPr vert="horz" rtlCol="0">
+            <a:spAutoFit/>
+          </a:bodyPr>
+          <a:lstStyle/>
+          <a:p>
+            <a:pPr algn="ctr"/>
+            <a:r>
+              <a:rPr lang="fr-FR" sz="900">
+                <a:solidFill>
+                  <a:srgbClr val="B4B4B4"/>
+                </a:solidFill>
+              </a:rPr>
+              <a:t>(c) titi_23 - mediateur-numerique.github.io - Reproduction interdite sans autorisation</a:t>
+            </a:r>
+          </a:p>
+        </p:txBody>
+      </p:sp>
     </p:spTree>
   </p:cSld>
   <p:clrMapOvr>
@@ -19396,6 +20076,46 @@
               <a:t>9 / 18</a:t>
             </a:r>
             <a:endParaRPr lang="en-US" sz="900" dirty="0"/>
+          </a:p>
+        </p:txBody>
+      </p:sp>
+      <p:sp>
+        <p:nvSpPr>
+          <p:cNvPr id="26" name="ZoneTexte 25">
+            <a:extLst>
+              <a:ext uri="{FF2B5EF4-FFF2-40B4-BE49-F238E27FC236}">
+                <a16:creationId xmlns:a16="http://schemas.microsoft.com/office/drawing/2014/main" id="{836103AE-9B4F-D434-6136-0D7A25A9E747}"/>
+              </a:ext>
+            </a:extLst>
+          </p:cNvPr>
+          <p:cNvSpPr txBox="1"/>
+          <p:nvPr/>
+        </p:nvSpPr>
+        <p:spPr>
+          <a:xfrm>
+            <a:off x="0" y="6578600"/>
+            <a:ext cx="12192000" cy="230832"/>
+          </a:xfrm>
+          <a:prstGeom prst="rect">
+            <a:avLst/>
+          </a:prstGeom>
+          <a:noFill/>
+        </p:spPr>
+        <p:txBody>
+          <a:bodyPr vert="horz" rtlCol="0">
+            <a:spAutoFit/>
+          </a:bodyPr>
+          <a:lstStyle/>
+          <a:p>
+            <a:pPr algn="ctr"/>
+            <a:r>
+              <a:rPr lang="fr-FR" sz="900">
+                <a:solidFill>
+                  <a:srgbClr val="B4B4B4"/>
+                </a:solidFill>
+              </a:rPr>
+              <a:t>(c) titi_23 - mediateur-numerique.github.io - Reproduction interdite sans autorisation</a:t>
+            </a:r>
           </a:p>
         </p:txBody>
       </p:sp>
